--- a/Slides/Baseball 1/Baseball_1_Lecture.pptx
+++ b/Slides/Baseball 1/Baseball_1_Lecture.pptx
@@ -210,7 +210,7 @@
           <a:p>
             <a:fld id="{C04E5E84-956F-4423-97B3-5936A6D8EEEE}" type="datetimeFigureOut">
               <a:rPr lang="en-US" smtClean="0"/>
-              <a:t>1/31/2025</a:t>
+              <a:t>6/26/2026</a:t>
             </a:fld>
             <a:endParaRPr lang="en-US"/>
           </a:p>
@@ -708,7 +708,7 @@
           <a:p>
             <a:fld id="{3881C039-66A3-4640-815B-3B5A8B7D868D}" type="datetimeFigureOut">
               <a:rPr lang="en-US" smtClean="0"/>
-              <a:t>1/31/2025</a:t>
+              <a:t>6/26/2026</a:t>
             </a:fld>
             <a:endParaRPr lang="en-US"/>
           </a:p>
@@ -906,7 +906,7 @@
           <a:p>
             <a:fld id="{3881C039-66A3-4640-815B-3B5A8B7D868D}" type="datetimeFigureOut">
               <a:rPr lang="en-US" smtClean="0"/>
-              <a:t>1/31/2025</a:t>
+              <a:t>6/26/2026</a:t>
             </a:fld>
             <a:endParaRPr lang="en-US"/>
           </a:p>
@@ -1114,7 +1114,7 @@
           <a:p>
             <a:fld id="{3881C039-66A3-4640-815B-3B5A8B7D868D}" type="datetimeFigureOut">
               <a:rPr lang="en-US" smtClean="0"/>
-              <a:t>1/31/2025</a:t>
+              <a:t>6/26/2026</a:t>
             </a:fld>
             <a:endParaRPr lang="en-US"/>
           </a:p>
@@ -1312,7 +1312,7 @@
           <a:p>
             <a:fld id="{3881C039-66A3-4640-815B-3B5A8B7D868D}" type="datetimeFigureOut">
               <a:rPr lang="en-US" smtClean="0"/>
-              <a:t>1/31/2025</a:t>
+              <a:t>6/26/2026</a:t>
             </a:fld>
             <a:endParaRPr lang="en-US"/>
           </a:p>
@@ -1587,7 +1587,7 @@
           <a:p>
             <a:fld id="{3881C039-66A3-4640-815B-3B5A8B7D868D}" type="datetimeFigureOut">
               <a:rPr lang="en-US" smtClean="0"/>
-              <a:t>1/31/2025</a:t>
+              <a:t>6/26/2026</a:t>
             </a:fld>
             <a:endParaRPr lang="en-US"/>
           </a:p>
@@ -1852,7 +1852,7 @@
           <a:p>
             <a:fld id="{3881C039-66A3-4640-815B-3B5A8B7D868D}" type="datetimeFigureOut">
               <a:rPr lang="en-US" smtClean="0"/>
-              <a:t>1/31/2025</a:t>
+              <a:t>6/26/2026</a:t>
             </a:fld>
             <a:endParaRPr lang="en-US"/>
           </a:p>
@@ -2264,7 +2264,7 @@
           <a:p>
             <a:fld id="{3881C039-66A3-4640-815B-3B5A8B7D868D}" type="datetimeFigureOut">
               <a:rPr lang="en-US" smtClean="0"/>
-              <a:t>1/31/2025</a:t>
+              <a:t>6/26/2026</a:t>
             </a:fld>
             <a:endParaRPr lang="en-US"/>
           </a:p>
@@ -2405,7 +2405,7 @@
           <a:p>
             <a:fld id="{3881C039-66A3-4640-815B-3B5A8B7D868D}" type="datetimeFigureOut">
               <a:rPr lang="en-US" smtClean="0"/>
-              <a:t>1/31/2025</a:t>
+              <a:t>6/26/2026</a:t>
             </a:fld>
             <a:endParaRPr lang="en-US"/>
           </a:p>
@@ -2518,7 +2518,7 @@
           <a:p>
             <a:fld id="{3881C039-66A3-4640-815B-3B5A8B7D868D}" type="datetimeFigureOut">
               <a:rPr lang="en-US" smtClean="0"/>
-              <a:t>1/31/2025</a:t>
+              <a:t>6/26/2026</a:t>
             </a:fld>
             <a:endParaRPr lang="en-US"/>
           </a:p>
@@ -2829,7 +2829,7 @@
           <a:p>
             <a:fld id="{3881C039-66A3-4640-815B-3B5A8B7D868D}" type="datetimeFigureOut">
               <a:rPr lang="en-US" smtClean="0"/>
-              <a:t>1/31/2025</a:t>
+              <a:t>6/26/2026</a:t>
             </a:fld>
             <a:endParaRPr lang="en-US"/>
           </a:p>
@@ -3117,7 +3117,7 @@
           <a:p>
             <a:fld id="{3881C039-66A3-4640-815B-3B5A8B7D868D}" type="datetimeFigureOut">
               <a:rPr lang="en-US" smtClean="0"/>
-              <a:t>1/31/2025</a:t>
+              <a:t>6/26/2026</a:t>
             </a:fld>
             <a:endParaRPr lang="en-US"/>
           </a:p>
@@ -3361,7 +3361,7 @@
           <a:p>
             <a:fld id="{3881C039-66A3-4640-815B-3B5A8B7D868D}" type="datetimeFigureOut">
               <a:rPr lang="en-US" smtClean="0"/>
-              <a:t>1/31/2025</a:t>
+              <a:t>6/26/2026</a:t>
             </a:fld>
             <a:endParaRPr lang="en-US"/>
           </a:p>
